--- a/docs/sales/PWE_Studio_销售介绍.pptx
+++ b/docs/sales/PWE_Studio_销售介绍.pptx
@@ -4261,7 +4261,7 @@
                           <a:ea typeface="Arial"/>
                           <a:cs typeface="Arial"/>
                         </a:rPr>
-                        <a:t>1500</a:t>
+                        <a:t>1000</a:t>
                       </a:r>
                     </a:p>
                   </a:txBody>
@@ -4365,7 +4365,7 @@
                           <a:ea typeface="Arial"/>
                           <a:cs typeface="Arial"/>
                         </a:rPr>
-                        <a:t>2</a:t>
+                        <a:t>1</a:t>
                       </a:r>
                     </a:p>
                   </a:txBody>
@@ -4416,7 +4416,7 @@
                           <a:ea typeface="Arial"/>
                           <a:cs typeface="Arial"/>
                         </a:rPr>
-                        <a:t>8</a:t>
+                        <a:t>5</a:t>
                       </a:r>
                     </a:p>
                   </a:txBody>
@@ -4571,7 +4571,7 @@
                           <a:ea typeface="Arial"/>
                           <a:cs typeface="Arial"/>
                         </a:rPr>
-                        <a:t>5 GB</a:t>
+                        <a:t>2 GB</a:t>
                       </a:r>
                     </a:p>
                   </a:txBody>
@@ -4622,7 +4622,7 @@
                           <a:ea typeface="Arial"/>
                           <a:cs typeface="Arial"/>
                         </a:rPr>
-                        <a:t>30 GB</a:t>
+                        <a:t>10 GB</a:t>
                       </a:r>
                     </a:p>
                   </a:txBody>
@@ -4673,7 +4673,7 @@
                           <a:ea typeface="Arial"/>
                           <a:cs typeface="Arial"/>
                         </a:rPr>
-                        <a:t>100 GB</a:t>
+                        <a:t>50 GB</a:t>
                       </a:r>
                     </a:p>
                   </a:txBody>
